--- a/figures/editable/01_时序综述图件/07_MERIT_Augmentation.pptx
+++ b/figures/editable/01_时序综述图件/07_MERIT_Augmentation.pptx
@@ -1080,7 +1080,7 @@
               </a:extLst>
             </p:cNvPr>
             <p:cNvSpPr>
-              <a:spLocks xmlns:a="http://schemas.openxmlformats.org/drawingml/2006/main" noGrp="1"/>
+              <a:spLocks xmlns:a="http://schemas.openxmlformats.org/drawingml/2006/main"/>
             </p:cNvSpPr>
             <p:nvPr/>
           </p:nvSpPr>
@@ -1115,7 +1115,7 @@
               </a:extLst>
             </p:cNvPr>
             <p:cNvSpPr>
-              <a:spLocks xmlns:a="http://schemas.openxmlformats.org/drawingml/2006/main" noGrp="1"/>
+              <a:spLocks xmlns:a="http://schemas.openxmlformats.org/drawingml/2006/main"/>
             </p:cNvSpPr>
             <p:nvPr/>
           </p:nvSpPr>
@@ -1171,7 +1171,7 @@
               </a:extLst>
             </p:cNvPr>
             <p:cNvSpPr>
-              <a:spLocks xmlns:a="http://schemas.openxmlformats.org/drawingml/2006/main" noGrp="1"/>
+              <a:spLocks xmlns:a="http://schemas.openxmlformats.org/drawingml/2006/main"/>
             </p:cNvSpPr>
             <p:nvPr/>
           </p:nvSpPr>
@@ -1227,7 +1227,7 @@
               </a:extLst>
             </p:cNvPr>
             <p:cNvSpPr>
-              <a:spLocks xmlns:a="http://schemas.openxmlformats.org/drawingml/2006/main" noGrp="1"/>
+              <a:spLocks xmlns:a="http://schemas.openxmlformats.org/drawingml/2006/main"/>
             </p:cNvSpPr>
             <p:nvPr/>
           </p:nvSpPr>
@@ -1262,7 +1262,7 @@
               </a:extLst>
             </p:cNvPr>
             <p:cNvSpPr>
-              <a:spLocks xmlns:a="http://schemas.openxmlformats.org/drawingml/2006/main" noGrp="1"/>
+              <a:spLocks xmlns:a="http://schemas.openxmlformats.org/drawingml/2006/main"/>
             </p:cNvSpPr>
             <p:nvPr/>
           </p:nvSpPr>
@@ -1318,7 +1318,7 @@
               </a:extLst>
             </p:cNvPr>
             <p:cNvSpPr>
-              <a:spLocks xmlns:a="http://schemas.openxmlformats.org/drawingml/2006/main" noGrp="1"/>
+              <a:spLocks xmlns:a="http://schemas.openxmlformats.org/drawingml/2006/main"/>
             </p:cNvSpPr>
             <p:nvPr/>
           </p:nvSpPr>
@@ -1359,7 +1359,7 @@
                   <a:ea typeface="Times New Roman"/>
                   <a:cs typeface="Times New Roman"/>
                 </a:rPr>
-                <a:t>generates a conditioned sample</a:t>
+                <a:t>selects suitable augmentation strategies</a:t>
               </a:r>
             </a:p>
           </p:txBody>
@@ -1374,7 +1374,7 @@
               </a:extLst>
             </p:cNvPr>
             <p:cNvSpPr>
-              <a:spLocks xmlns:a="http://schemas.openxmlformats.org/drawingml/2006/main" noGrp="1"/>
+              <a:spLocks xmlns:a="http://schemas.openxmlformats.org/drawingml/2006/main"/>
             </p:cNvSpPr>
             <p:nvPr/>
           </p:nvSpPr>
@@ -1409,7 +1409,7 @@
               </a:extLst>
             </p:cNvPr>
             <p:cNvSpPr>
-              <a:spLocks xmlns:a="http://schemas.openxmlformats.org/drawingml/2006/main" noGrp="1"/>
+              <a:spLocks xmlns:a="http://schemas.openxmlformats.org/drawingml/2006/main"/>
             </p:cNvSpPr>
             <p:nvPr/>
           </p:nvSpPr>
@@ -1465,7 +1465,7 @@
               </a:extLst>
             </p:cNvPr>
             <p:cNvSpPr>
-              <a:spLocks xmlns:a="http://schemas.openxmlformats.org/drawingml/2006/main" noGrp="1"/>
+              <a:spLocks xmlns:a="http://schemas.openxmlformats.org/drawingml/2006/main"/>
             </p:cNvSpPr>
             <p:nvPr/>
           </p:nvSpPr>
@@ -1506,7 +1506,7 @@
                   <a:ea typeface="Times New Roman"/>
                   <a:cs typeface="Times New Roman"/>
                 </a:rPr>
-                <a:t>checks fidelity and utility</a:t>
+                <a:t>semantic quality of positive views</a:t>
               </a:r>
             </a:p>
           </p:txBody>
@@ -1521,7 +1521,7 @@
               </a:extLst>
             </p:cNvPr>
             <p:cNvSpPr>
-              <a:spLocks xmlns:a="http://schemas.openxmlformats.org/drawingml/2006/main" noGrp="1"/>
+              <a:spLocks xmlns:a="http://schemas.openxmlformats.org/drawingml/2006/main"/>
             </p:cNvSpPr>
             <p:nvPr/>
           </p:nvSpPr>
@@ -1556,7 +1556,7 @@
               </a:extLst>
             </p:cNvPr>
             <p:cNvSpPr>
-              <a:spLocks xmlns:a="http://schemas.openxmlformats.org/drawingml/2006/main" noGrp="1"/>
+              <a:spLocks xmlns:a="http://schemas.openxmlformats.org/drawingml/2006/main"/>
             </p:cNvSpPr>
             <p:nvPr/>
           </p:nvSpPr>
@@ -1612,7 +1612,7 @@
               </a:extLst>
             </p:cNvPr>
             <p:cNvSpPr>
-              <a:spLocks xmlns:a="http://schemas.openxmlformats.org/drawingml/2006/main" noGrp="1"/>
+              <a:spLocks xmlns:a="http://schemas.openxmlformats.org/drawingml/2006/main"/>
             </p:cNvSpPr>
             <p:nvPr/>
           </p:nvSpPr>
@@ -1653,7 +1653,7 @@
                   <a:ea typeface="Times New Roman"/>
                   <a:cs typeface="Times New Roman"/>
                 </a:rPr>
-                <a:t>keeps usable data</a:t>
+                <a:t>positive views for contrastive learning</a:t>
               </a:r>
             </a:p>
           </p:txBody>
@@ -1680,7 +1680,7 @@
                 <a:srgbClr val="438B86"/>
               </a:solidFill>
               <a:prstDash val="solid"/>
-              <a:headEnd type="arrow" w="sm" len="sm"/>
+              <a:tailEnd type="arrow" w="sm" len="sm"/>
             </a:ln>
           </p:spPr>
         </p:cxnSp>
@@ -1706,7 +1706,7 @@
                 <a:srgbClr val="B77F2B"/>
               </a:solidFill>
               <a:prstDash val="solid"/>
-              <a:headEnd type="arrow" w="sm" len="sm"/>
+              <a:tailEnd type="arrow" w="sm" len="sm"/>
             </a:ln>
           </p:spPr>
         </p:cxnSp>
@@ -1732,36 +1732,52 @@
                 <a:srgbClr val="78639F"/>
               </a:solidFill>
               <a:prstDash val="solid"/>
-              <a:headEnd type="arrow" w="sm" len="sm"/>
+              <a:tailEnd type="arrow" w="sm" len="sm"/>
             </a:ln>
           </p:spPr>
         </p:cxnSp>
-        <p:cxnSp>
-          <p:nvCxnSpPr>
+        <p:sp>
+          <p:nvSpPr>
             <p:cNvPr id="34" name=""/>
-            <p:cNvCxnSpPr>
-              <a:stCxn xmlns:a="http://schemas.openxmlformats.org/drawingml/2006/main" id="7" idx="3"/>
-              <a:endCxn xmlns:a="http://schemas.openxmlformats.org/drawingml/2006/main" id="1" idx="1"/>
-            </p:cNvCxnSpPr>
+            <p:cNvSpPr/>
             <p:nvPr/>
-          </p:nvCxnSpPr>
+          </p:nvSpPr>
           <p:spPr>
-            <a:xfrm xmlns:a="http://schemas.openxmlformats.org/drawingml/2006/main" flipH="1">
-              <a:off x="762000" y="2881313"/>
-              <a:ext cx="8382000" cy="0"/>
+            <a:xfrm xmlns:a="http://schemas.openxmlformats.org/drawingml/2006/main">
+              <a:off x="1857375" y="3381375"/>
+              <a:ext cx="6191250" cy="571500"/>
             </a:xfrm>
-            <a:prstGeom xmlns:a="http://schemas.openxmlformats.org/drawingml/2006/main" prst="straightConnector1">
-              <a:avLst/>
-            </a:prstGeom>
+            <ns0:custGeom xmlns:ns0="http://schemas.openxmlformats.org/drawingml/2006/main">
+              <ns0:avLst/>
+              <ns0:gdLst/>
+              <ns0:ahLst/>
+              <ns0:cxnLst/>
+              <ns0:pathLst>
+                <ns0:path w="6191250" h="571500" fill="none" stroke="1">
+                  <ns0:moveTo>
+                    <ns0:pt x="6191250" y="0"/>
+                  </ns0:moveTo>
+                  <ns0:lnTo>
+                    <ns0:pt x="6191250" y="571500"/>
+                  </ns0:lnTo>
+                  <ns0:lnTo>
+                    <ns0:pt x="0" y="571500"/>
+                  </ns0:lnTo>
+                  <ns0:lnTo>
+                    <ns0:pt x="0" y="0"/>
+                  </ns0:lnTo>
+                </ns0:path>
+              </ns0:pathLst>
+            </ns0:custGeom>
             <a:ln xmlns:a="http://schemas.openxmlformats.org/drawingml/2006/main" w="19050">
               <a:solidFill>
-                <a:srgbClr val="F3E2DE"/>
+                <a:srgbClr val="B77F2B"/>
               </a:solidFill>
               <a:prstDash val="dash"/>
-              <a:headEnd type="arrow" w="sm" len="sm"/>
+              <a:tailEnd type="arrow" w="sm" len="sm"/>
             </a:ln>
           </p:spPr>
-        </p:cxnSp>
+        </p:sp>
         <p:sp>
           <p:nvSpPr>
             <p:cNvPr id="17" name="">
@@ -1772,7 +1788,7 @@
               </a:extLst>
             </p:cNvPr>
             <p:cNvSpPr>
-              <a:spLocks xmlns:a="http://schemas.openxmlformats.org/drawingml/2006/main" noGrp="1"/>
+              <a:spLocks xmlns:a="http://schemas.openxmlformats.org/drawingml/2006/main"/>
             </p:cNvSpPr>
             <p:nvPr/>
           </p:nvSpPr>
@@ -1813,7 +1829,7 @@
                   <a:ea typeface="Times New Roman"/>
                   <a:cs typeface="Times New Roman"/>
                 </a:rPr>
-                <a:t>retrieval  →  generation  →  review  →  downstream use</a:t>
+                <a:t/>
               </a:r>
             </a:p>
           </p:txBody>
@@ -1828,7 +1844,7 @@
               </a:extLst>
             </p:cNvPr>
             <p:cNvSpPr>
-              <a:spLocks xmlns:a="http://schemas.openxmlformats.org/drawingml/2006/main" noGrp="1"/>
+              <a:spLocks xmlns:a="http://schemas.openxmlformats.org/drawingml/2006/main"/>
             </p:cNvSpPr>
             <p:nvPr/>
           </p:nvSpPr>
@@ -1869,7 +1885,7 @@
                   <a:ea typeface="Times New Roman"/>
                   <a:cs typeface="Times New Roman"/>
                 </a:rPr>
-                <a:t>Temporal fidelity: dependence, missingness, distribution  |  Utility: downstream task performance</a:t>
+                <a:t/>
               </a:r>
             </a:p>
           </p:txBody>
